--- a/PALEOCLIMATOLOGIE_presentation_DU_PROEJET.pptx
+++ b/PALEOCLIMATOLOGIE_presentation_DU_PROEJET.pptx
@@ -128,6 +128,11 @@
       </a:defRPr>
     </a:lvl9pPr>
   </p:defaultTextStyle>
+  <p:extLst>
+    <p:ext uri="{EFAFB233-063F-42B5-8137-9DF3F51BA10A}">
+      <p15:sldGuideLst xmlns:p15="http://schemas.microsoft.com/office/powerpoint/2012/main"/>
+    </p:ext>
+  </p:extLst>
 </p:presentation>
 </file>
 
@@ -280,7 +285,7 @@
           <a:p>
             <a:fld id="{839A69C3-06C6-4ABB-B8A0-8EFC5B14A64C}" type="datetimeFigureOut">
               <a:rPr lang="en-HK" smtClean="0"/>
-              <a:t>18/5/2025</a:t>
+              <a:t>19/5/2025</a:t>
             </a:fld>
             <a:endParaRPr lang="en-HK"/>
           </a:p>
@@ -334,7 +339,7 @@
           <a:p>
             <a:fld id="{75F6E9B1-877C-411B-87E3-717BA5B5A813}" type="slidenum">
               <a:rPr lang="en-HK" smtClean="0"/>
-              <a:t>‹#›</a:t>
+              <a:t>‹N°›</a:t>
             </a:fld>
             <a:endParaRPr lang="en-HK"/>
           </a:p>
@@ -480,7 +485,7 @@
           <a:p>
             <a:fld id="{839A69C3-06C6-4ABB-B8A0-8EFC5B14A64C}" type="datetimeFigureOut">
               <a:rPr lang="en-HK" smtClean="0"/>
-              <a:t>18/5/2025</a:t>
+              <a:t>19/5/2025</a:t>
             </a:fld>
             <a:endParaRPr lang="en-HK"/>
           </a:p>
@@ -534,7 +539,7 @@
           <a:p>
             <a:fld id="{75F6E9B1-877C-411B-87E3-717BA5B5A813}" type="slidenum">
               <a:rPr lang="en-HK" smtClean="0"/>
-              <a:t>‹#›</a:t>
+              <a:t>‹N°›</a:t>
             </a:fld>
             <a:endParaRPr lang="en-HK"/>
           </a:p>
@@ -690,7 +695,7 @@
           <a:p>
             <a:fld id="{839A69C3-06C6-4ABB-B8A0-8EFC5B14A64C}" type="datetimeFigureOut">
               <a:rPr lang="en-HK" smtClean="0"/>
-              <a:t>18/5/2025</a:t>
+              <a:t>19/5/2025</a:t>
             </a:fld>
             <a:endParaRPr lang="en-HK"/>
           </a:p>
@@ -744,7 +749,7 @@
           <a:p>
             <a:fld id="{75F6E9B1-877C-411B-87E3-717BA5B5A813}" type="slidenum">
               <a:rPr lang="en-HK" smtClean="0"/>
-              <a:t>‹#›</a:t>
+              <a:t>‹N°›</a:t>
             </a:fld>
             <a:endParaRPr lang="en-HK"/>
           </a:p>
@@ -890,7 +895,7 @@
           <a:p>
             <a:fld id="{839A69C3-06C6-4ABB-B8A0-8EFC5B14A64C}" type="datetimeFigureOut">
               <a:rPr lang="en-HK" smtClean="0"/>
-              <a:t>18/5/2025</a:t>
+              <a:t>19/5/2025</a:t>
             </a:fld>
             <a:endParaRPr lang="en-HK"/>
           </a:p>
@@ -944,7 +949,7 @@
           <a:p>
             <a:fld id="{75F6E9B1-877C-411B-87E3-717BA5B5A813}" type="slidenum">
               <a:rPr lang="en-HK" smtClean="0"/>
-              <a:t>‹#›</a:t>
+              <a:t>‹N°›</a:t>
             </a:fld>
             <a:endParaRPr lang="en-HK"/>
           </a:p>
@@ -1166,7 +1171,7 @@
           <a:p>
             <a:fld id="{839A69C3-06C6-4ABB-B8A0-8EFC5B14A64C}" type="datetimeFigureOut">
               <a:rPr lang="en-HK" smtClean="0"/>
-              <a:t>18/5/2025</a:t>
+              <a:t>19/5/2025</a:t>
             </a:fld>
             <a:endParaRPr lang="en-HK"/>
           </a:p>
@@ -1220,7 +1225,7 @@
           <a:p>
             <a:fld id="{75F6E9B1-877C-411B-87E3-717BA5B5A813}" type="slidenum">
               <a:rPr lang="en-HK" smtClean="0"/>
-              <a:t>‹#›</a:t>
+              <a:t>‹N°›</a:t>
             </a:fld>
             <a:endParaRPr lang="en-HK"/>
           </a:p>
@@ -1434,7 +1439,7 @@
           <a:p>
             <a:fld id="{839A69C3-06C6-4ABB-B8A0-8EFC5B14A64C}" type="datetimeFigureOut">
               <a:rPr lang="en-HK" smtClean="0"/>
-              <a:t>18/5/2025</a:t>
+              <a:t>19/5/2025</a:t>
             </a:fld>
             <a:endParaRPr lang="en-HK"/>
           </a:p>
@@ -1488,7 +1493,7 @@
           <a:p>
             <a:fld id="{75F6E9B1-877C-411B-87E3-717BA5B5A813}" type="slidenum">
               <a:rPr lang="en-HK" smtClean="0"/>
-              <a:t>‹#›</a:t>
+              <a:t>‹N°›</a:t>
             </a:fld>
             <a:endParaRPr lang="en-HK"/>
           </a:p>
@@ -1849,7 +1854,7 @@
           <a:p>
             <a:fld id="{839A69C3-06C6-4ABB-B8A0-8EFC5B14A64C}" type="datetimeFigureOut">
               <a:rPr lang="en-HK" smtClean="0"/>
-              <a:t>18/5/2025</a:t>
+              <a:t>19/5/2025</a:t>
             </a:fld>
             <a:endParaRPr lang="en-HK"/>
           </a:p>
@@ -1903,7 +1908,7 @@
           <a:p>
             <a:fld id="{75F6E9B1-877C-411B-87E3-717BA5B5A813}" type="slidenum">
               <a:rPr lang="en-HK" smtClean="0"/>
-              <a:t>‹#›</a:t>
+              <a:t>‹N°›</a:t>
             </a:fld>
             <a:endParaRPr lang="en-HK"/>
           </a:p>
@@ -1991,7 +1996,7 @@
           <a:p>
             <a:fld id="{839A69C3-06C6-4ABB-B8A0-8EFC5B14A64C}" type="datetimeFigureOut">
               <a:rPr lang="en-HK" smtClean="0"/>
-              <a:t>18/5/2025</a:t>
+              <a:t>19/5/2025</a:t>
             </a:fld>
             <a:endParaRPr lang="en-HK"/>
           </a:p>
@@ -2045,7 +2050,7 @@
           <a:p>
             <a:fld id="{75F6E9B1-877C-411B-87E3-717BA5B5A813}" type="slidenum">
               <a:rPr lang="en-HK" smtClean="0"/>
-              <a:t>‹#›</a:t>
+              <a:t>‹N°›</a:t>
             </a:fld>
             <a:endParaRPr lang="en-HK"/>
           </a:p>
@@ -2104,7 +2109,7 @@
           <a:p>
             <a:fld id="{839A69C3-06C6-4ABB-B8A0-8EFC5B14A64C}" type="datetimeFigureOut">
               <a:rPr lang="en-HK" smtClean="0"/>
-              <a:t>18/5/2025</a:t>
+              <a:t>19/5/2025</a:t>
             </a:fld>
             <a:endParaRPr lang="en-HK"/>
           </a:p>
@@ -2158,7 +2163,7 @@
           <a:p>
             <a:fld id="{75F6E9B1-877C-411B-87E3-717BA5B5A813}" type="slidenum">
               <a:rPr lang="en-HK" smtClean="0"/>
-              <a:t>‹#›</a:t>
+              <a:t>‹N°›</a:t>
             </a:fld>
             <a:endParaRPr lang="en-HK"/>
           </a:p>
@@ -2417,7 +2422,7 @@
           <a:p>
             <a:fld id="{839A69C3-06C6-4ABB-B8A0-8EFC5B14A64C}" type="datetimeFigureOut">
               <a:rPr lang="en-HK" smtClean="0"/>
-              <a:t>18/5/2025</a:t>
+              <a:t>19/5/2025</a:t>
             </a:fld>
             <a:endParaRPr lang="en-HK"/>
           </a:p>
@@ -2471,7 +2476,7 @@
           <a:p>
             <a:fld id="{75F6E9B1-877C-411B-87E3-717BA5B5A813}" type="slidenum">
               <a:rPr lang="en-HK" smtClean="0"/>
-              <a:t>‹#›</a:t>
+              <a:t>‹N°›</a:t>
             </a:fld>
             <a:endParaRPr lang="en-HK"/>
           </a:p>
@@ -2706,7 +2711,7 @@
           <a:p>
             <a:fld id="{839A69C3-06C6-4ABB-B8A0-8EFC5B14A64C}" type="datetimeFigureOut">
               <a:rPr lang="en-HK" smtClean="0"/>
-              <a:t>18/5/2025</a:t>
+              <a:t>19/5/2025</a:t>
             </a:fld>
             <a:endParaRPr lang="en-HK"/>
           </a:p>
@@ -2760,7 +2765,7 @@
           <a:p>
             <a:fld id="{75F6E9B1-877C-411B-87E3-717BA5B5A813}" type="slidenum">
               <a:rPr lang="en-HK" smtClean="0"/>
-              <a:t>‹#›</a:t>
+              <a:t>‹N°›</a:t>
             </a:fld>
             <a:endParaRPr lang="en-HK"/>
           </a:p>
@@ -2949,7 +2954,7 @@
           <a:p>
             <a:fld id="{839A69C3-06C6-4ABB-B8A0-8EFC5B14A64C}" type="datetimeFigureOut">
               <a:rPr lang="en-HK" smtClean="0"/>
-              <a:t>18/5/2025</a:t>
+              <a:t>19/5/2025</a:t>
             </a:fld>
             <a:endParaRPr lang="en-HK"/>
           </a:p>
@@ -3039,7 +3044,7 @@
           <a:p>
             <a:fld id="{75F6E9B1-877C-411B-87E3-717BA5B5A813}" type="slidenum">
               <a:rPr lang="en-HK" smtClean="0"/>
-              <a:t>‹#›</a:t>
+              <a:t>‹N°›</a:t>
             </a:fld>
             <a:endParaRPr lang="en-HK"/>
           </a:p>
@@ -3603,7 +3608,7 @@
             </a:r>
             <a:r>
               <a:rPr lang="fr-FR" dirty="0"/>
-              <a:t> : Trouvé un maximum de data sur chaque pays</a:t>
+              <a:t> : Trouver un maximum de data sur chaque pays</a:t>
             </a:r>
             <a:endParaRPr lang="en-HK" dirty="0"/>
           </a:p>
@@ -3803,7 +3808,7 @@
                   <a:srgbClr val="FFFF00"/>
                 </a:highlight>
               </a:rPr>
-              <a:t>Bibliographie des papiers de recherches</a:t>
+              <a:t>Bibliographie des papiers de recherche</a:t>
             </a:r>
             <a:endParaRPr lang="en-HK" dirty="0">
               <a:highlight>
@@ -4099,8 +4104,8 @@
         </p:nvSpPr>
         <p:spPr>
           <a:xfrm>
-            <a:off x="8016241" y="3197352"/>
-            <a:ext cx="1752600" cy="914400"/>
+            <a:off x="8016240" y="3197352"/>
+            <a:ext cx="2404109" cy="914400"/>
           </a:xfrm>
           <a:prstGeom prst="roundRect">
             <a:avLst/>
@@ -4128,12 +4133,8 @@
           <a:p>
             <a:pPr algn="ctr"/>
             <a:r>
-              <a:rPr lang="fr-FR" b="1" dirty="0" err="1"/>
-              <a:t>Tree</a:t>
-            </a:r>
-            <a:r>
               <a:rPr lang="fr-FR" b="1" dirty="0"/>
-              <a:t> rings</a:t>
+              <a:t>Dendrochronologie</a:t>
             </a:r>
             <a:endParaRPr lang="en-HK" b="1" dirty="0"/>
           </a:p>
@@ -4200,8 +4201,8 @@
         </p:nvCxnSpPr>
         <p:spPr>
           <a:xfrm rot="16200000" flipH="1">
-            <a:off x="7111746" y="1416557"/>
-            <a:ext cx="765048" cy="2796541"/>
+            <a:off x="7274623" y="1253680"/>
+            <a:ext cx="765048" cy="3122295"/>
           </a:xfrm>
           <a:prstGeom prst="bentConnector3">
             <a:avLst>
@@ -4281,13 +4282,14 @@
           <p:cNvCxnSpPr>
             <a:cxnSpLocks/>
             <a:stCxn id="14" idx="2"/>
+            <a:endCxn id="27" idx="0"/>
           </p:cNvCxnSpPr>
           <p:nvPr/>
         </p:nvCxnSpPr>
         <p:spPr>
-          <a:xfrm>
-            <a:off x="8892541" y="4111752"/>
-            <a:ext cx="0" cy="615696"/>
+          <a:xfrm flipH="1">
+            <a:off x="9218294" y="4111752"/>
+            <a:ext cx="1" cy="615696"/>
           </a:xfrm>
           <a:prstGeom prst="straightConnector1">
             <a:avLst/>
@@ -4387,7 +4389,7 @@
         </p:blipFill>
         <p:spPr bwMode="auto">
           <a:xfrm>
-            <a:off x="7856983" y="4727448"/>
+            <a:off x="8182736" y="4727448"/>
             <a:ext cx="2071116" cy="1380744"/>
           </a:xfrm>
           <a:prstGeom prst="rect">
@@ -4443,25 +4445,7 @@
                 </a:solidFill>
                 <a:effectLst/>
               </a:rPr>
-              <a:t>Réseau de </a:t>
-            </a:r>
-            <a:r>
-              <a:rPr lang="fr-FR" sz="1100" b="0" i="0" dirty="0" err="1">
-                <a:solidFill>
-                  <a:srgbClr val="000000"/>
-                </a:solidFill>
-                <a:effectLst/>
-              </a:rPr>
-              <a:t>neuronnes</a:t>
-            </a:r>
-            <a:r>
-              <a:rPr lang="fr-FR" sz="1100" b="0" i="0" dirty="0">
-                <a:solidFill>
-                  <a:srgbClr val="000000"/>
-                </a:solidFill>
-                <a:effectLst/>
-              </a:rPr>
-              <a:t>: </a:t>
+              <a:t>Réseau de neurones: </a:t>
             </a:r>
             <a:endParaRPr lang="fr-FR" sz="1100" dirty="0">
               <a:effectLst/>
@@ -5170,7 +5154,7 @@
                   <a:srgbClr val="FFFF00"/>
                 </a:highlight>
               </a:rPr>
-              <a:t>Interprétation des données et ce que nous dit l’Histoire:</a:t>
+              <a:t>Interprétation historique des données :</a:t>
             </a:r>
             <a:endParaRPr lang="en-HK" dirty="0">
               <a:highlight>
@@ -5594,7 +5578,7 @@
             <a:pPr algn="ctr"/>
             <a:r>
               <a:rPr lang="fr-FR" b="1" dirty="0"/>
-              <a:t>DATE DE FLEURISAISON DES CERISIER DE KYOTO</a:t>
+              <a:t>DATE DE FLORAISON DES CERISIER DE KYOTO</a:t>
             </a:r>
             <a:endParaRPr lang="en-HK" b="1" dirty="0"/>
           </a:p>
@@ -5614,8 +5598,8 @@
         </p:nvSpPr>
         <p:spPr>
           <a:xfrm>
-            <a:off x="9537187" y="3197352"/>
-            <a:ext cx="1752600" cy="914400"/>
+            <a:off x="8641080" y="3197352"/>
+            <a:ext cx="2874643" cy="914400"/>
           </a:xfrm>
           <a:prstGeom prst="roundRect">
             <a:avLst/>
@@ -5643,12 +5627,8 @@
           <a:p>
             <a:pPr algn="ctr"/>
             <a:r>
-              <a:rPr lang="fr-FR" b="1" dirty="0" err="1"/>
-              <a:t>Tree</a:t>
-            </a:r>
-            <a:r>
               <a:rPr lang="fr-FR" b="1" dirty="0"/>
-              <a:t> rings</a:t>
+              <a:t>DENDROCHRONOLOGIE</a:t>
             </a:r>
             <a:endParaRPr lang="en-HK" b="1" dirty="0"/>
           </a:p>
@@ -5715,8 +5695,8 @@
         </p:nvCxnSpPr>
         <p:spPr>
           <a:xfrm rot="16200000" flipH="1">
-            <a:off x="7872219" y="656084"/>
-            <a:ext cx="765048" cy="4317487"/>
+            <a:off x="7704677" y="823627"/>
+            <a:ext cx="765048" cy="3982402"/>
           </a:xfrm>
           <a:prstGeom prst="bentConnector3">
             <a:avLst>
@@ -5796,13 +5776,14 @@
           <p:cNvCxnSpPr>
             <a:cxnSpLocks/>
             <a:stCxn id="14" idx="2"/>
+            <a:endCxn id="27" idx="0"/>
           </p:cNvCxnSpPr>
           <p:nvPr/>
         </p:nvCxnSpPr>
         <p:spPr>
-          <a:xfrm>
-            <a:off x="10413487" y="4111752"/>
-            <a:ext cx="0" cy="615696"/>
+          <a:xfrm flipH="1">
+            <a:off x="10078401" y="4111752"/>
+            <a:ext cx="1" cy="615696"/>
           </a:xfrm>
           <a:prstGeom prst="straightConnector1">
             <a:avLst/>
@@ -5902,7 +5883,7 @@
         </p:blipFill>
         <p:spPr bwMode="auto">
           <a:xfrm>
-            <a:off x="9377929" y="4727448"/>
+            <a:off x="9042843" y="4727448"/>
             <a:ext cx="2071116" cy="1380744"/>
           </a:xfrm>
           <a:prstGeom prst="rect">
@@ -6032,7 +6013,7 @@
         <p:spPr>
           <a:xfrm>
             <a:off x="1778509" y="4111752"/>
-            <a:ext cx="2562705" cy="1607588"/>
+            <a:ext cx="2592360" cy="1607588"/>
           </a:xfrm>
           <a:prstGeom prst="straightConnector1">
             <a:avLst/>
@@ -6071,7 +6052,7 @@
         <p:spPr>
           <a:xfrm>
             <a:off x="3104208" y="5719340"/>
-            <a:ext cx="2474011" cy="369332"/>
+            <a:ext cx="2533322" cy="369332"/>
           </a:xfrm>
           <a:prstGeom prst="rect">
             <a:avLst/>
@@ -6086,7 +6067,7 @@
           <a:p>
             <a:r>
               <a:rPr lang="fr-FR" dirty="0"/>
-              <a:t>MODÈLE D’ARRHENUS</a:t>
+              <a:t>MODÈLE D’ARRHENIUS</a:t>
             </a:r>
             <a:endParaRPr lang="en-HK" dirty="0"/>
           </a:p>
@@ -6365,15 +6346,7 @@
                   <a:srgbClr val="FFFF00"/>
                 </a:highlight>
               </a:rPr>
-              <a:t>Modèle d’</a:t>
-            </a:r>
-            <a:r>
-              <a:rPr lang="fr-FR" dirty="0" err="1">
-                <a:highlight>
-                  <a:srgbClr val="FFFF00"/>
-                </a:highlight>
-              </a:rPr>
-              <a:t>Arrhenus</a:t>
+              <a:t>Modèle d’Arrhenius</a:t>
             </a:r>
             <a:endParaRPr lang="en-HK" dirty="0">
               <a:highlight>
@@ -6531,7 +6504,7 @@
         </p:nvSpPr>
         <p:spPr>
           <a:xfrm>
-            <a:off x="9638149" y="1706977"/>
+            <a:off x="9618330" y="1819179"/>
             <a:ext cx="2545080" cy="914400"/>
           </a:xfrm>
           <a:prstGeom prst="roundRect">
@@ -6561,7 +6534,7 @@
             <a:pPr algn="ctr"/>
             <a:r>
               <a:rPr lang="fr-FR" b="1" dirty="0"/>
-              <a:t>DATE DE FLEURISAISON DES CERISIER DE KYOTO</a:t>
+              <a:t>DATE DE FLORAISON DES CERISIER DE KYOTO</a:t>
             </a:r>
             <a:endParaRPr lang="en-HK" b="1" dirty="0"/>
           </a:p>
@@ -6696,7 +6669,7 @@
         <p:spPr>
           <a:xfrm>
             <a:off x="905256" y="1792224"/>
-            <a:ext cx="7912615" cy="369332"/>
+            <a:ext cx="7793544" cy="369332"/>
           </a:xfrm>
           <a:prstGeom prst="rect">
             <a:avLst/>
@@ -6711,7 +6684,7 @@
           <a:p>
             <a:r>
               <a:rPr lang="fr-FR" dirty="0"/>
-              <a:t>T = f(d) 			Avec d = date des fleurissons des cerisiers à Kyoto</a:t>
+              <a:t>T = f(d) 			Avec d = date des floraisons des cerisiers à Kyoto</a:t>
             </a:r>
           </a:p>
         </p:txBody>
@@ -6906,7 +6879,7 @@
         </p:nvSpPr>
         <p:spPr>
           <a:xfrm>
-            <a:off x="9638149" y="1706977"/>
+            <a:off x="9646920" y="1792224"/>
             <a:ext cx="2545080" cy="914400"/>
           </a:xfrm>
           <a:prstGeom prst="roundRect">
@@ -6936,7 +6909,7 @@
             <a:pPr algn="ctr"/>
             <a:r>
               <a:rPr lang="fr-FR" b="1" dirty="0"/>
-              <a:t>DATE DE FLEURISAISON DES CERISIER DE KYOTO</a:t>
+              <a:t>DATE DE FLORAISON DES CERISIER DE KYOTO</a:t>
             </a:r>
             <a:endParaRPr lang="en-HK" b="1" dirty="0"/>
           </a:p>
@@ -7079,7 +7052,7 @@
           <a:p>
             <a:r>
               <a:rPr lang="fr-FR" dirty="0"/>
-              <a:t>Objectif initial : Reconstruire la température moyenne du mois de mars du japon dès 1000 dernières années grâces aux données suivantes :</a:t>
+              <a:t>Objectif initial : Reconstruire la température moyenne du mois de mars du japon dès 1000 dernières années grâce aux données suivantes :</a:t>
             </a:r>
           </a:p>
           <a:p>
@@ -7453,7 +7426,7 @@
             <a:pPr algn="ctr"/>
             <a:r>
               <a:rPr lang="fr-FR" b="1" dirty="0"/>
-              <a:t>DATE DE FLEURISAISON DES CERISIER DE KYOTO</a:t>
+              <a:t>DATE DE FLORAISON DES CERISIER DE KYOTO</a:t>
             </a:r>
             <a:endParaRPr lang="en-HK" b="1" dirty="0"/>
           </a:p>
@@ -7570,8 +7543,8 @@
         </p:nvSpPr>
         <p:spPr>
           <a:xfrm>
-            <a:off x="9518899" y="1706977"/>
-            <a:ext cx="1752600" cy="914400"/>
+            <a:off x="9200384" y="1706977"/>
+            <a:ext cx="2391541" cy="914400"/>
           </a:xfrm>
           <a:prstGeom prst="roundRect">
             <a:avLst/>
@@ -7599,12 +7572,8 @@
           <a:p>
             <a:pPr algn="ctr"/>
             <a:r>
-              <a:rPr lang="fr-FR" b="1" dirty="0" err="1"/>
-              <a:t>Tree</a:t>
-            </a:r>
-            <a:r>
               <a:rPr lang="fr-FR" b="1" dirty="0"/>
-              <a:t> rings</a:t>
+              <a:t>Dendrochronologie</a:t>
             </a:r>
             <a:endParaRPr lang="en-HK" b="1" dirty="0"/>
           </a:p>
@@ -7639,7 +7608,7 @@
         </p:blipFill>
         <p:spPr bwMode="auto">
           <a:xfrm>
-            <a:off x="9807696" y="240032"/>
+            <a:off x="9520810" y="93062"/>
             <a:ext cx="2071115" cy="2071115"/>
           </a:xfrm>
           <a:prstGeom prst="rect">
@@ -7824,7 +7793,7 @@
             <a:pPr algn="ctr"/>
             <a:r>
               <a:rPr lang="fr-FR" b="1" dirty="0"/>
-              <a:t>GEL DU LAC TORNIONJOKI</a:t>
+              <a:t>GEL DE LA RIVIERE TORNIONJOKI</a:t>
             </a:r>
             <a:endParaRPr lang="en-HK" b="1" dirty="0"/>
           </a:p>
@@ -8231,7 +8200,7 @@
             <a:pPr algn="ctr"/>
             <a:r>
               <a:rPr lang="fr-FR" b="1" dirty="0"/>
-              <a:t>GEL DU LAC TORNIONJOKI</a:t>
+              <a:t>GEL DE LA RIVIERE TORNIONJOKI</a:t>
             </a:r>
             <a:endParaRPr lang="en-HK" b="1" dirty="0"/>
           </a:p>
@@ -8566,7 +8535,7 @@
                   <a:srgbClr val="FFFF00"/>
                 </a:highlight>
               </a:rPr>
-              <a:t>Futur du projet</a:t>
+              <a:t>Suite du projet</a:t>
             </a:r>
             <a:endParaRPr lang="en-HK" dirty="0">
               <a:highlight>
@@ -8599,7 +8568,7 @@
           <a:p>
             <a:r>
               <a:rPr lang="fr-FR" dirty="0"/>
-              <a:t>Recherche de tendance</a:t>
+              <a:t>Recherche de tendances</a:t>
             </a:r>
           </a:p>
           <a:p>
@@ -9054,8 +9023,8 @@
         </p:nvSpPr>
         <p:spPr>
           <a:xfrm>
-            <a:off x="999508" y="4460413"/>
-            <a:ext cx="10192983" cy="369332"/>
+            <a:off x="838200" y="4473100"/>
+            <a:ext cx="8395953" cy="369332"/>
           </a:xfrm>
           <a:prstGeom prst="rect">
             <a:avLst/>
@@ -9070,7 +9039,7 @@
           <a:p>
             <a:r>
               <a:rPr lang="fr-FR" dirty="0"/>
-              <a:t>RECONSTRUCTION DE TROIS CLIMATS DANS TROIS LOCALISATION GÉOGRAPHIQUES DIFFÉRENTES</a:t>
+              <a:t>- Reconstruction de trois climats dans trois localisations géographiques différentes</a:t>
             </a:r>
             <a:endParaRPr lang="en-HK" dirty="0"/>
           </a:p>
@@ -9090,8 +9059,8 @@
         </p:nvSpPr>
         <p:spPr>
           <a:xfrm>
-            <a:off x="264191" y="5115209"/>
-            <a:ext cx="11155554" cy="369332"/>
+            <a:off x="838200" y="4842432"/>
+            <a:ext cx="10651314" cy="369332"/>
           </a:xfrm>
           <a:prstGeom prst="rect">
             <a:avLst/>
@@ -9106,7 +9075,7 @@
           <a:p>
             <a:r>
               <a:rPr lang="fr-FR" dirty="0"/>
-              <a:t>RECHERCHE DE TENDANCE ET LE COMPARÉ AVEC LES TENDANCES CLIMATIQUES DE L’HÉMISPSHÈRE NORD</a:t>
+              <a:t>- Recherche de tendances locales, à comparer avec les tendances macroscopiques de l’hémisphère nord</a:t>
             </a:r>
             <a:endParaRPr lang="en-HK" dirty="0"/>
           </a:p>
@@ -9522,7 +9491,7 @@
         <p:spPr>
           <a:xfrm>
             <a:off x="4404095" y="5406866"/>
-            <a:ext cx="2639336" cy="369332"/>
+            <a:ext cx="2639336" cy="646331"/>
           </a:xfrm>
           <a:prstGeom prst="rect">
             <a:avLst/>
@@ -9542,12 +9511,8 @@
           <a:p>
             <a:pPr algn="ctr"/>
             <a:r>
-              <a:rPr lang="fr-FR" b="1" dirty="0" err="1"/>
-              <a:t>Dendrocologie</a:t>
-            </a:r>
-            <a:r>
               <a:rPr lang="fr-FR" b="1" dirty="0"/>
-              <a:t> à Kyoto</a:t>
+              <a:t>Dendrochronologie à Suwa</a:t>
             </a:r>
             <a:endParaRPr lang="en-HK" b="1" dirty="0"/>
           </a:p>
@@ -10015,8 +9980,8 @@
           <a:p>
             <a:pPr algn="ctr"/>
             <a:r>
-              <a:rPr lang="fr-FR" b="1" dirty="0" err="1"/>
-              <a:t>Dendrocologie</a:t>
+              <a:rPr lang="fr-FR" b="1" dirty="0"/>
+              <a:t>Dendrochronologie</a:t>
             </a:r>
             <a:endParaRPr lang="en-HK" b="1" dirty="0"/>
           </a:p>
@@ -10390,7 +10355,7 @@
         <p:spPr>
           <a:xfrm>
             <a:off x="5719188" y="4612627"/>
-            <a:ext cx="4152" cy="811366"/>
+            <a:ext cx="249785" cy="811366"/>
           </a:xfrm>
           <a:prstGeom prst="straightConnector1">
             <a:avLst/>
@@ -10428,8 +10393,8 @@
         </p:nvSpPr>
         <p:spPr>
           <a:xfrm>
-            <a:off x="4403672" y="5423993"/>
-            <a:ext cx="2639336" cy="369332"/>
+            <a:off x="4403671" y="5423993"/>
+            <a:ext cx="3130603" cy="369332"/>
           </a:xfrm>
           <a:prstGeom prst="rect">
             <a:avLst/>
@@ -10450,7 +10415,11 @@
             <a:pPr algn="ctr"/>
             <a:r>
               <a:rPr lang="fr-FR" b="1" dirty="0"/>
-              <a:t>Gel d’un lac</a:t>
+              <a:t>Gel de la rivière </a:t>
+            </a:r>
+            <a:r>
+              <a:rPr lang="fr-FR" b="1" dirty="0" err="1"/>
+              <a:t>Tornionjoki</a:t>
             </a:r>
             <a:endParaRPr lang="en-HK" b="1" dirty="0"/>
           </a:p>
@@ -10514,7 +10483,7 @@
         </p:nvSpPr>
         <p:spPr>
           <a:xfrm>
-            <a:off x="6096000" y="5793325"/>
+            <a:off x="6443867" y="5793325"/>
             <a:ext cx="966931" cy="369332"/>
           </a:xfrm>
           <a:prstGeom prst="rect">
@@ -10889,7 +10858,7 @@
             </a:r>
             <a:r>
               <a:rPr lang="fr-FR" dirty="0"/>
-              <a:t> : Trouvé un maximum de data sur chaque pays</a:t>
+              <a:t> : Trouver un maximum de data sur chaque pays</a:t>
             </a:r>
             <a:endParaRPr lang="en-HK" dirty="0"/>
           </a:p>

--- a/PALEOCLIMATOLOGIE_presentation_DU_PROEJET.pptx
+++ b/PALEOCLIMATOLOGIE_presentation_DU_PROEJET.pptx
@@ -136,6 +136,89 @@
 </p:presentation>
 </file>
 
+<file path=ppt/revisionInfo.xml><?xml version="1.0" encoding="utf-8"?>
+<p1510:revInfo xmlns:a="http://schemas.openxmlformats.org/drawingml/2006/main" xmlns:r="http://schemas.openxmlformats.org/officeDocument/2006/relationships" xmlns:p1510="http://schemas.microsoft.com/office/powerpoint/2015/10/main">
+  <p1510:revLst>
+    <p1510:client id="{49065972-5317-42B7-8774-121C1DC3676C}" v="7" dt="2025-05-19T10:21:23.856"/>
+  </p1510:revLst>
+</p1510:revInfo>
+</file>
+
+<file path=ppt/changesInfos/changesInfo1.xml><?xml version="1.0" encoding="utf-8"?>
+<pc:chgInfo xmlns:a="http://schemas.openxmlformats.org/drawingml/2006/main" xmlns:r="http://schemas.openxmlformats.org/officeDocument/2006/relationships" xmlns:ac="http://schemas.microsoft.com/office/drawing/2013/main/command" xmlns:pc="http://schemas.microsoft.com/office/powerpoint/2013/main/command">
+  <pc:docChgLst>
+    <pc:chgData name="Maxime Saffon" userId="25515bfe69c2a72d" providerId="LiveId" clId="{49065972-5317-42B7-8774-121C1DC3676C}"/>
+    <pc:docChg chg="custSel modSld">
+      <pc:chgData name="Maxime Saffon" userId="25515bfe69c2a72d" providerId="LiveId" clId="{49065972-5317-42B7-8774-121C1DC3676C}" dt="2025-05-19T10:21:23.856" v="11" actId="1076"/>
+      <pc:docMkLst>
+        <pc:docMk/>
+      </pc:docMkLst>
+      <pc:sldChg chg="modSp mod">
+        <pc:chgData name="Maxime Saffon" userId="25515bfe69c2a72d" providerId="LiveId" clId="{49065972-5317-42B7-8774-121C1DC3676C}" dt="2025-05-19T10:19:42.298" v="1" actId="13926"/>
+        <pc:sldMkLst>
+          <pc:docMk/>
+          <pc:sldMk cId="4021005611" sldId="256"/>
+        </pc:sldMkLst>
+        <pc:spChg chg="mod">
+          <ac:chgData name="Maxime Saffon" userId="25515bfe69c2a72d" providerId="LiveId" clId="{49065972-5317-42B7-8774-121C1DC3676C}" dt="2025-05-19T10:19:42.298" v="1" actId="13926"/>
+          <ac:spMkLst>
+            <pc:docMk/>
+            <pc:sldMk cId="4021005611" sldId="256"/>
+            <ac:spMk id="3" creationId="{BB7162E2-F2C2-FE4B-48B0-4A5B3F9B9CAC}"/>
+          </ac:spMkLst>
+        </pc:spChg>
+      </pc:sldChg>
+      <pc:sldChg chg="modSp mod">
+        <pc:chgData name="Maxime Saffon" userId="25515bfe69c2a72d" providerId="LiveId" clId="{49065972-5317-42B7-8774-121C1DC3676C}" dt="2025-05-19T10:19:57.748" v="2" actId="1076"/>
+        <pc:sldMkLst>
+          <pc:docMk/>
+          <pc:sldMk cId="164036177" sldId="262"/>
+        </pc:sldMkLst>
+        <pc:spChg chg="mod">
+          <ac:chgData name="Maxime Saffon" userId="25515bfe69c2a72d" providerId="LiveId" clId="{49065972-5317-42B7-8774-121C1DC3676C}" dt="2025-05-19T10:19:57.748" v="2" actId="1076"/>
+          <ac:spMkLst>
+            <pc:docMk/>
+            <pc:sldMk cId="164036177" sldId="262"/>
+            <ac:spMk id="31" creationId="{4746ADEB-4AC1-E1DB-D97E-E542DCD12150}"/>
+          </ac:spMkLst>
+        </pc:spChg>
+      </pc:sldChg>
+      <pc:sldChg chg="addSp delSp modSp mod">
+        <pc:chgData name="Maxime Saffon" userId="25515bfe69c2a72d" providerId="LiveId" clId="{49065972-5317-42B7-8774-121C1DC3676C}" dt="2025-05-19T10:21:23.856" v="11" actId="1076"/>
+        <pc:sldMkLst>
+          <pc:docMk/>
+          <pc:sldMk cId="2543521050" sldId="267"/>
+        </pc:sldMkLst>
+        <pc:spChg chg="del mod">
+          <ac:chgData name="Maxime Saffon" userId="25515bfe69c2a72d" providerId="LiveId" clId="{49065972-5317-42B7-8774-121C1DC3676C}" dt="2025-05-19T10:20:55.425" v="5" actId="478"/>
+          <ac:spMkLst>
+            <pc:docMk/>
+            <pc:sldMk cId="2543521050" sldId="267"/>
+            <ac:spMk id="6" creationId="{023A00A0-F05B-9CF8-DB5A-314C7DE13CE2}"/>
+          </ac:spMkLst>
+        </pc:spChg>
+        <pc:picChg chg="add del mod">
+          <ac:chgData name="Maxime Saffon" userId="25515bfe69c2a72d" providerId="LiveId" clId="{49065972-5317-42B7-8774-121C1DC3676C}" dt="2025-05-19T10:21:17.838" v="8" actId="478"/>
+          <ac:picMkLst>
+            <pc:docMk/>
+            <pc:sldMk cId="2543521050" sldId="267"/>
+            <ac:picMk id="1026" creationId="{E07A7923-20A0-9D11-2BD4-EB27B8F84EC1}"/>
+          </ac:picMkLst>
+        </pc:picChg>
+        <pc:picChg chg="add mod">
+          <ac:chgData name="Maxime Saffon" userId="25515bfe69c2a72d" providerId="LiveId" clId="{49065972-5317-42B7-8774-121C1DC3676C}" dt="2025-05-19T10:21:23.856" v="11" actId="1076"/>
+          <ac:picMkLst>
+            <pc:docMk/>
+            <pc:sldMk cId="2543521050" sldId="267"/>
+            <ac:picMk id="1028" creationId="{F637F614-F401-8D82-3007-C77FC7EFC303}"/>
+          </ac:picMkLst>
+        </pc:picChg>
+      </pc:sldChg>
+    </pc:docChg>
+  </pc:docChgLst>
+</pc:chgInfo>
+</file>
+
 <file path=ppt/slideLayouts/slideLayout1.xml><?xml version="1.0" encoding="utf-8"?>
 <p:sldLayout xmlns:a="http://schemas.openxmlformats.org/drawingml/2006/main" xmlns:r="http://schemas.openxmlformats.org/officeDocument/2006/relationships" xmlns:p="http://schemas.openxmlformats.org/presentationml/2006/main" type="title" preserve="1">
   <p:cSld name="Title Slide">
@@ -339,7 +422,7 @@
           <a:p>
             <a:fld id="{75F6E9B1-877C-411B-87E3-717BA5B5A813}" type="slidenum">
               <a:rPr lang="en-HK" smtClean="0"/>
-              <a:t>‹N°›</a:t>
+              <a:t>‹#›</a:t>
             </a:fld>
             <a:endParaRPr lang="en-HK"/>
           </a:p>
@@ -539,7 +622,7 @@
           <a:p>
             <a:fld id="{75F6E9B1-877C-411B-87E3-717BA5B5A813}" type="slidenum">
               <a:rPr lang="en-HK" smtClean="0"/>
-              <a:t>‹N°›</a:t>
+              <a:t>‹#›</a:t>
             </a:fld>
             <a:endParaRPr lang="en-HK"/>
           </a:p>
@@ -749,7 +832,7 @@
           <a:p>
             <a:fld id="{75F6E9B1-877C-411B-87E3-717BA5B5A813}" type="slidenum">
               <a:rPr lang="en-HK" smtClean="0"/>
-              <a:t>‹N°›</a:t>
+              <a:t>‹#›</a:t>
             </a:fld>
             <a:endParaRPr lang="en-HK"/>
           </a:p>
@@ -949,7 +1032,7 @@
           <a:p>
             <a:fld id="{75F6E9B1-877C-411B-87E3-717BA5B5A813}" type="slidenum">
               <a:rPr lang="en-HK" smtClean="0"/>
-              <a:t>‹N°›</a:t>
+              <a:t>‹#›</a:t>
             </a:fld>
             <a:endParaRPr lang="en-HK"/>
           </a:p>
@@ -1225,7 +1308,7 @@
           <a:p>
             <a:fld id="{75F6E9B1-877C-411B-87E3-717BA5B5A813}" type="slidenum">
               <a:rPr lang="en-HK" smtClean="0"/>
-              <a:t>‹N°›</a:t>
+              <a:t>‹#›</a:t>
             </a:fld>
             <a:endParaRPr lang="en-HK"/>
           </a:p>
@@ -1493,7 +1576,7 @@
           <a:p>
             <a:fld id="{75F6E9B1-877C-411B-87E3-717BA5B5A813}" type="slidenum">
               <a:rPr lang="en-HK" smtClean="0"/>
-              <a:t>‹N°›</a:t>
+              <a:t>‹#›</a:t>
             </a:fld>
             <a:endParaRPr lang="en-HK"/>
           </a:p>
@@ -1908,7 +1991,7 @@
           <a:p>
             <a:fld id="{75F6E9B1-877C-411B-87E3-717BA5B5A813}" type="slidenum">
               <a:rPr lang="en-HK" smtClean="0"/>
-              <a:t>‹N°›</a:t>
+              <a:t>‹#›</a:t>
             </a:fld>
             <a:endParaRPr lang="en-HK"/>
           </a:p>
@@ -2050,7 +2133,7 @@
           <a:p>
             <a:fld id="{75F6E9B1-877C-411B-87E3-717BA5B5A813}" type="slidenum">
               <a:rPr lang="en-HK" smtClean="0"/>
-              <a:t>‹N°›</a:t>
+              <a:t>‹#›</a:t>
             </a:fld>
             <a:endParaRPr lang="en-HK"/>
           </a:p>
@@ -2163,7 +2246,7 @@
           <a:p>
             <a:fld id="{75F6E9B1-877C-411B-87E3-717BA5B5A813}" type="slidenum">
               <a:rPr lang="en-HK" smtClean="0"/>
-              <a:t>‹N°›</a:t>
+              <a:t>‹#›</a:t>
             </a:fld>
             <a:endParaRPr lang="en-HK"/>
           </a:p>
@@ -2476,7 +2559,7 @@
           <a:p>
             <a:fld id="{75F6E9B1-877C-411B-87E3-717BA5B5A813}" type="slidenum">
               <a:rPr lang="en-HK" smtClean="0"/>
-              <a:t>‹N°›</a:t>
+              <a:t>‹#›</a:t>
             </a:fld>
             <a:endParaRPr lang="en-HK"/>
           </a:p>
@@ -2765,7 +2848,7 @@
           <a:p>
             <a:fld id="{75F6E9B1-877C-411B-87E3-717BA5B5A813}" type="slidenum">
               <a:rPr lang="en-HK" smtClean="0"/>
-              <a:t>‹N°›</a:t>
+              <a:t>‹#›</a:t>
             </a:fld>
             <a:endParaRPr lang="en-HK"/>
           </a:p>
@@ -3044,7 +3127,7 @@
           <a:p>
             <a:fld id="{75F6E9B1-877C-411B-87E3-717BA5B5A813}" type="slidenum">
               <a:rPr lang="en-HK" smtClean="0"/>
-              <a:t>‹N°›</a:t>
+              <a:t>‹#›</a:t>
             </a:fld>
             <a:endParaRPr lang="en-HK"/>
           </a:p>
@@ -9664,7 +9747,7 @@
         </p:nvSpPr>
         <p:spPr>
           <a:xfrm>
-            <a:off x="6096000" y="5776198"/>
+            <a:off x="6096000" y="6053197"/>
             <a:ext cx="1040734" cy="369332"/>
           </a:xfrm>
           <a:prstGeom prst="rect">
@@ -11432,42 +11515,53 @@
           </a:prstGeom>
         </p:spPr>
       </p:pic>
-      <p:sp>
-        <p:nvSpPr>
-          <p:cNvPr id="6" name="TextBox 5">
-            <a:extLst>
-              <a:ext uri="{FF2B5EF4-FFF2-40B4-BE49-F238E27FC236}">
-                <a16:creationId xmlns:a16="http://schemas.microsoft.com/office/drawing/2014/main" id="{023A00A0-F05B-9CF8-DB5A-314C7DE13CE2}"/>
-              </a:ext>
-            </a:extLst>
-          </p:cNvPr>
-          <p:cNvSpPr txBox="1"/>
-          <p:nvPr/>
-        </p:nvSpPr>
-        <p:spPr>
-          <a:xfrm>
-            <a:off x="1636776" y="4451044"/>
-            <a:ext cx="3035831" cy="369332"/>
+      <p:pic>
+        <p:nvPicPr>
+          <p:cNvPr id="1028" name="Picture 4" descr="Histoire du climat depuis l'an Mil | Emmanuel Le Roy Ladurie - Librairie  KOEGUI">
+            <a:extLst>
+              <a:ext uri="{FF2B5EF4-FFF2-40B4-BE49-F238E27FC236}">
+                <a16:creationId xmlns:a16="http://schemas.microsoft.com/office/drawing/2014/main" id="{F637F614-F401-8D82-3007-C77FC7EFC303}"/>
+              </a:ext>
+            </a:extLst>
+          </p:cNvPr>
+          <p:cNvPicPr>
+            <a:picLocks noChangeAspect="1" noChangeArrowheads="1"/>
+          </p:cNvPicPr>
+          <p:nvPr/>
+        </p:nvPicPr>
+        <p:blipFill>
+          <a:blip r:embed="rId4">
+            <a:extLst>
+              <a:ext uri="{28A0092B-C50C-407E-A947-70E740481C1C}">
+                <a14:useLocalDpi xmlns:a14="http://schemas.microsoft.com/office/drawing/2010/main" val="0"/>
+              </a:ext>
+            </a:extLst>
+          </a:blip>
+          <a:srcRect/>
+          <a:stretch>
+            <a:fillRect/>
+          </a:stretch>
+        </p:blipFill>
+        <p:spPr bwMode="auto">
+          <a:xfrm>
+            <a:off x="1882570" y="2747963"/>
+            <a:ext cx="3240088" cy="3429000"/>
           </a:xfrm>
           <a:prstGeom prst="rect">
             <a:avLst/>
           </a:prstGeom>
           <a:noFill/>
-        </p:spPr>
-        <p:txBody>
-          <a:bodyPr wrap="none" rtlCol="0">
-            <a:spAutoFit/>
-          </a:bodyPr>
-          <a:lstStyle/>
-          <a:p>
-            <a:r>
-              <a:rPr lang="fr-FR" b="1" dirty="0"/>
-              <a:t>IMAGE DU LIVRE DE CIBLAT</a:t>
-            </a:r>
-            <a:endParaRPr lang="en-HK" b="1" dirty="0"/>
-          </a:p>
-        </p:txBody>
-      </p:sp>
+          <a:extLst>
+            <a:ext uri="{909E8E84-426E-40DD-AFC4-6F175D3DCCD1}">
+              <a14:hiddenFill xmlns:a14="http://schemas.microsoft.com/office/drawing/2010/main">
+                <a:solidFill>
+                  <a:srgbClr val="FFFFFF"/>
+                </a:solidFill>
+              </a14:hiddenFill>
+            </a:ext>
+          </a:extLst>
+        </p:spPr>
+      </p:pic>
     </p:spTree>
     <p:extLst>
       <p:ext uri="{BB962C8B-B14F-4D97-AF65-F5344CB8AC3E}">

--- a/PALEOCLIMATOLOGIE_presentation_DU_PROEJET.pptx
+++ b/PALEOCLIMATOLOGIE_presentation_DU_PROEJET.pptx
@@ -139,7 +139,7 @@
 <file path=ppt/revisionInfo.xml><?xml version="1.0" encoding="utf-8"?>
 <p1510:revInfo xmlns:a="http://schemas.openxmlformats.org/drawingml/2006/main" xmlns:r="http://schemas.openxmlformats.org/officeDocument/2006/relationships" xmlns:p1510="http://schemas.microsoft.com/office/powerpoint/2015/10/main">
   <p1510:revLst>
-    <p1510:client id="{49065972-5317-42B7-8774-121C1DC3676C}" v="7" dt="2025-05-19T10:21:23.856"/>
+    <p1510:client id="{49065972-5317-42B7-8774-121C1DC3676C}" v="12" dt="2025-05-26T12:46:06.839"/>
   </p1510:revLst>
 </p1510:revInfo>
 </file>
@@ -148,8 +148,8 @@
 <pc:chgInfo xmlns:a="http://schemas.openxmlformats.org/drawingml/2006/main" xmlns:r="http://schemas.openxmlformats.org/officeDocument/2006/relationships" xmlns:ac="http://schemas.microsoft.com/office/drawing/2013/main/command" xmlns:pc="http://schemas.microsoft.com/office/powerpoint/2013/main/command">
   <pc:docChgLst>
     <pc:chgData name="Maxime Saffon" userId="25515bfe69c2a72d" providerId="LiveId" clId="{49065972-5317-42B7-8774-121C1DC3676C}"/>
-    <pc:docChg chg="custSel modSld">
-      <pc:chgData name="Maxime Saffon" userId="25515bfe69c2a72d" providerId="LiveId" clId="{49065972-5317-42B7-8774-121C1DC3676C}" dt="2025-05-19T10:21:23.856" v="11" actId="1076"/>
+    <pc:docChg chg="undo custSel modSld">
+      <pc:chgData name="Maxime Saffon" userId="25515bfe69c2a72d" providerId="LiveId" clId="{49065972-5317-42B7-8774-121C1DC3676C}" dt="2025-05-26T12:46:06.839" v="33" actId="1076"/>
       <pc:docMkLst>
         <pc:docMk/>
       </pc:docMkLst>
@@ -189,28 +189,42 @@
           <pc:docMk/>
           <pc:sldMk cId="2543521050" sldId="267"/>
         </pc:sldMkLst>
-        <pc:spChg chg="del mod">
-          <ac:chgData name="Maxime Saffon" userId="25515bfe69c2a72d" providerId="LiveId" clId="{49065972-5317-42B7-8774-121C1DC3676C}" dt="2025-05-19T10:20:55.425" v="5" actId="478"/>
-          <ac:spMkLst>
-            <pc:docMk/>
-            <pc:sldMk cId="2543521050" sldId="267"/>
-            <ac:spMk id="6" creationId="{023A00A0-F05B-9CF8-DB5A-314C7DE13CE2}"/>
-          </ac:spMkLst>
-        </pc:spChg>
-        <pc:picChg chg="add del mod">
-          <ac:chgData name="Maxime Saffon" userId="25515bfe69c2a72d" providerId="LiveId" clId="{49065972-5317-42B7-8774-121C1DC3676C}" dt="2025-05-19T10:21:17.838" v="8" actId="478"/>
-          <ac:picMkLst>
-            <pc:docMk/>
-            <pc:sldMk cId="2543521050" sldId="267"/>
-            <ac:picMk id="1026" creationId="{E07A7923-20A0-9D11-2BD4-EB27B8F84EC1}"/>
-          </ac:picMkLst>
-        </pc:picChg>
         <pc:picChg chg="add mod">
           <ac:chgData name="Maxime Saffon" userId="25515bfe69c2a72d" providerId="LiveId" clId="{49065972-5317-42B7-8774-121C1DC3676C}" dt="2025-05-19T10:21:23.856" v="11" actId="1076"/>
           <ac:picMkLst>
             <pc:docMk/>
             <pc:sldMk cId="2543521050" sldId="267"/>
             <ac:picMk id="1028" creationId="{F637F614-F401-8D82-3007-C77FC7EFC303}"/>
+          </ac:picMkLst>
+        </pc:picChg>
+      </pc:sldChg>
+      <pc:sldChg chg="modSp mod">
+        <pc:chgData name="Maxime Saffon" userId="25515bfe69c2a72d" providerId="LiveId" clId="{49065972-5317-42B7-8774-121C1DC3676C}" dt="2025-05-26T10:45:16.982" v="28" actId="1036"/>
+        <pc:sldMkLst>
+          <pc:docMk/>
+          <pc:sldMk cId="4164114872" sldId="272"/>
+        </pc:sldMkLst>
+        <pc:picChg chg="mod">
+          <ac:chgData name="Maxime Saffon" userId="25515bfe69c2a72d" providerId="LiveId" clId="{49065972-5317-42B7-8774-121C1DC3676C}" dt="2025-05-26T10:45:16.982" v="28" actId="1036"/>
+          <ac:picMkLst>
+            <pc:docMk/>
+            <pc:sldMk cId="4164114872" sldId="272"/>
+            <ac:picMk id="5" creationId="{50423B6B-1FBA-2383-E34D-CF5EBE7979A0}"/>
+          </ac:picMkLst>
+        </pc:picChg>
+      </pc:sldChg>
+      <pc:sldChg chg="modSp">
+        <pc:chgData name="Maxime Saffon" userId="25515bfe69c2a72d" providerId="LiveId" clId="{49065972-5317-42B7-8774-121C1DC3676C}" dt="2025-05-26T12:46:06.839" v="33" actId="1076"/>
+        <pc:sldMkLst>
+          <pc:docMk/>
+          <pc:sldMk cId="4105236305" sldId="281"/>
+        </pc:sldMkLst>
+        <pc:picChg chg="mod">
+          <ac:chgData name="Maxime Saffon" userId="25515bfe69c2a72d" providerId="LiveId" clId="{49065972-5317-42B7-8774-121C1DC3676C}" dt="2025-05-26T12:46:06.839" v="33" actId="1076"/>
+          <ac:picMkLst>
+            <pc:docMk/>
+            <pc:sldMk cId="4105236305" sldId="281"/>
+            <ac:picMk id="14342" creationId="{5BF06CF9-F7A5-8491-B8F7-B00FF30EFB3B}"/>
           </ac:picMkLst>
         </pc:picChg>
       </pc:sldChg>
@@ -368,7 +382,7 @@
           <a:p>
             <a:fld id="{839A69C3-06C6-4ABB-B8A0-8EFC5B14A64C}" type="datetimeFigureOut">
               <a:rPr lang="en-HK" smtClean="0"/>
-              <a:t>19/5/2025</a:t>
+              <a:t>26/5/2025</a:t>
             </a:fld>
             <a:endParaRPr lang="en-HK"/>
           </a:p>
@@ -568,7 +582,7 @@
           <a:p>
             <a:fld id="{839A69C3-06C6-4ABB-B8A0-8EFC5B14A64C}" type="datetimeFigureOut">
               <a:rPr lang="en-HK" smtClean="0"/>
-              <a:t>19/5/2025</a:t>
+              <a:t>26/5/2025</a:t>
             </a:fld>
             <a:endParaRPr lang="en-HK"/>
           </a:p>
@@ -778,7 +792,7 @@
           <a:p>
             <a:fld id="{839A69C3-06C6-4ABB-B8A0-8EFC5B14A64C}" type="datetimeFigureOut">
               <a:rPr lang="en-HK" smtClean="0"/>
-              <a:t>19/5/2025</a:t>
+              <a:t>26/5/2025</a:t>
             </a:fld>
             <a:endParaRPr lang="en-HK"/>
           </a:p>
@@ -978,7 +992,7 @@
           <a:p>
             <a:fld id="{839A69C3-06C6-4ABB-B8A0-8EFC5B14A64C}" type="datetimeFigureOut">
               <a:rPr lang="en-HK" smtClean="0"/>
-              <a:t>19/5/2025</a:t>
+              <a:t>26/5/2025</a:t>
             </a:fld>
             <a:endParaRPr lang="en-HK"/>
           </a:p>
@@ -1254,7 +1268,7 @@
           <a:p>
             <a:fld id="{839A69C3-06C6-4ABB-B8A0-8EFC5B14A64C}" type="datetimeFigureOut">
               <a:rPr lang="en-HK" smtClean="0"/>
-              <a:t>19/5/2025</a:t>
+              <a:t>26/5/2025</a:t>
             </a:fld>
             <a:endParaRPr lang="en-HK"/>
           </a:p>
@@ -1522,7 +1536,7 @@
           <a:p>
             <a:fld id="{839A69C3-06C6-4ABB-B8A0-8EFC5B14A64C}" type="datetimeFigureOut">
               <a:rPr lang="en-HK" smtClean="0"/>
-              <a:t>19/5/2025</a:t>
+              <a:t>26/5/2025</a:t>
             </a:fld>
             <a:endParaRPr lang="en-HK"/>
           </a:p>
@@ -1937,7 +1951,7 @@
           <a:p>
             <a:fld id="{839A69C3-06C6-4ABB-B8A0-8EFC5B14A64C}" type="datetimeFigureOut">
               <a:rPr lang="en-HK" smtClean="0"/>
-              <a:t>19/5/2025</a:t>
+              <a:t>26/5/2025</a:t>
             </a:fld>
             <a:endParaRPr lang="en-HK"/>
           </a:p>
@@ -2079,7 +2093,7 @@
           <a:p>
             <a:fld id="{839A69C3-06C6-4ABB-B8A0-8EFC5B14A64C}" type="datetimeFigureOut">
               <a:rPr lang="en-HK" smtClean="0"/>
-              <a:t>19/5/2025</a:t>
+              <a:t>26/5/2025</a:t>
             </a:fld>
             <a:endParaRPr lang="en-HK"/>
           </a:p>
@@ -2192,7 +2206,7 @@
           <a:p>
             <a:fld id="{839A69C3-06C6-4ABB-B8A0-8EFC5B14A64C}" type="datetimeFigureOut">
               <a:rPr lang="en-HK" smtClean="0"/>
-              <a:t>19/5/2025</a:t>
+              <a:t>26/5/2025</a:t>
             </a:fld>
             <a:endParaRPr lang="en-HK"/>
           </a:p>
@@ -2505,7 +2519,7 @@
           <a:p>
             <a:fld id="{839A69C3-06C6-4ABB-B8A0-8EFC5B14A64C}" type="datetimeFigureOut">
               <a:rPr lang="en-HK" smtClean="0"/>
-              <a:t>19/5/2025</a:t>
+              <a:t>26/5/2025</a:t>
             </a:fld>
             <a:endParaRPr lang="en-HK"/>
           </a:p>
@@ -2794,7 +2808,7 @@
           <a:p>
             <a:fld id="{839A69C3-06C6-4ABB-B8A0-8EFC5B14A64C}" type="datetimeFigureOut">
               <a:rPr lang="en-HK" smtClean="0"/>
-              <a:t>19/5/2025</a:t>
+              <a:t>26/5/2025</a:t>
             </a:fld>
             <a:endParaRPr lang="en-HK"/>
           </a:p>
@@ -3037,7 +3051,7 @@
           <a:p>
             <a:fld id="{839A69C3-06C6-4ABB-B8A0-8EFC5B14A64C}" type="datetimeFigureOut">
               <a:rPr lang="en-HK" smtClean="0"/>
-              <a:t>19/5/2025</a:t>
+              <a:t>26/5/2025</a:t>
             </a:fld>
             <a:endParaRPr lang="en-HK"/>
           </a:p>
@@ -8716,8 +8730,8 @@
         </p:blipFill>
         <p:spPr bwMode="auto">
           <a:xfrm>
-            <a:off x="2286000" y="3805301"/>
-            <a:ext cx="7620000" cy="2952750"/>
+            <a:off x="-2949934" y="857320"/>
+            <a:ext cx="13273185" cy="5143359"/>
           </a:xfrm>
           <a:prstGeom prst="rect">
             <a:avLst/>
